--- a/ML_rumos_luis_bras.pptx
+++ b/ML_rumos_luis_bras.pptx
@@ -3456,7 +3456,64 @@
           <a:bodyPr/>
           <a:lstStyle/>
           <a:p>
-            <a:endParaRPr lang="en-US" dirty="0"/>
+            <a:r>
+              <a:rPr lang="en-US" dirty="0"/>
+              <a:t>Data preparation (validation and Preprocessing  steps)</a:t>
+            </a:r>
+          </a:p>
+          <a:p>
+            <a:r>
+              <a:rPr lang="en-US" dirty="0"/>
+              <a:t>Exploratory data </a:t>
+            </a:r>
+            <a:r>
+              <a:rPr lang="en-US" dirty="0" err="1"/>
+              <a:t>analysys</a:t>
+            </a:r>
+            <a:r>
+              <a:rPr lang="en-US" dirty="0"/>
+              <a:t> and </a:t>
+            </a:r>
+            <a:r>
+              <a:rPr lang="en-US" dirty="0" err="1"/>
+              <a:t>feauture</a:t>
+            </a:r>
+            <a:r>
+              <a:rPr lang="en-US" dirty="0"/>
+              <a:t> engineering</a:t>
+            </a:r>
+          </a:p>
+          <a:p>
+            <a:r>
+              <a:rPr lang="en-US" dirty="0"/>
+              <a:t>Training parameters</a:t>
+            </a:r>
+          </a:p>
+          <a:p>
+            <a:r>
+              <a:rPr lang="en-US" dirty="0"/>
+              <a:t>Model selection</a:t>
+            </a:r>
+          </a:p>
+          <a:p>
+            <a:r>
+              <a:rPr lang="en-US" dirty="0"/>
+              <a:t>Best model selection criteria</a:t>
+            </a:r>
+          </a:p>
+          <a:p>
+            <a:r>
+              <a:rPr lang="en-US" dirty="0"/>
+              <a:t>Optimization (</a:t>
+            </a:r>
+            <a:r>
+              <a:rPr lang="en-US" dirty="0" err="1"/>
+              <a:t>optuna</a:t>
+            </a:r>
+            <a:r>
+              <a:rPr lang="en-US" dirty="0"/>
+              <a:t> and Grid Search CV)</a:t>
+            </a:r>
           </a:p>
         </p:txBody>
       </p:sp>

--- a/ML_rumos_luis_bras.pptx
+++ b/ML_rumos_luis_bras.pptx
@@ -233,7 +233,7 @@
           <a:p>
             <a:fld id="{8798D0C1-C2ED-41E6-A16A-129D089D71E0}" type="datetimeFigureOut">
               <a:rPr lang="en-US" smtClean="0"/>
-              <a:t>5/31/2026</a:t>
+              <a:t>6/1/2026</a:t>
             </a:fld>
             <a:endParaRPr lang="en-US"/>
           </a:p>
@@ -544,6 +544,220 @@
           <a:bodyPr/>
           <a:lstStyle/>
           <a:p>
+            <a:endParaRPr lang="en-US" dirty="0"/>
+          </a:p>
+        </p:txBody>
+      </p:sp>
+      <p:sp>
+        <p:nvSpPr>
+          <p:cNvPr id="4" name="Slide Number Placeholder 3"/>
+          <p:cNvSpPr>
+            <a:spLocks noGrp="1"/>
+          </p:cNvSpPr>
+          <p:nvPr>
+            <p:ph type="sldNum" sz="quarter" idx="5"/>
+          </p:nvPr>
+        </p:nvSpPr>
+        <p:spPr/>
+        <p:txBody>
+          <a:bodyPr/>
+          <a:lstStyle/>
+          <a:p>
+            <a:fld id="{217EA878-87F4-4811-8C6C-83CB5CDC59F1}" type="slidenum">
+              <a:rPr lang="en-US" smtClean="0"/>
+              <a:t>1</a:t>
+            </a:fld>
+            <a:endParaRPr lang="en-US"/>
+          </a:p>
+        </p:txBody>
+      </p:sp>
+    </p:spTree>
+    <p:extLst>
+      <p:ext uri="{BB962C8B-B14F-4D97-AF65-F5344CB8AC3E}">
+        <p14:creationId xmlns:p14="http://schemas.microsoft.com/office/powerpoint/2010/main" val="4079845966"/>
+      </p:ext>
+    </p:extLst>
+  </p:cSld>
+  <p:clrMapOvr>
+    <a:masterClrMapping/>
+  </p:clrMapOvr>
+</p:notes>
+</file>
+
+<file path=ppt/notesSlides/notesSlide10.xml><?xml version="1.0" encoding="utf-8"?>
+<p:notes xmlns:a="http://schemas.openxmlformats.org/drawingml/2006/main" xmlns:r="http://schemas.openxmlformats.org/officeDocument/2006/relationships" xmlns:p="http://schemas.openxmlformats.org/presentationml/2006/main">
+  <p:cSld>
+    <p:spTree>
+      <p:nvGrpSpPr>
+        <p:cNvPr id="1" name=""/>
+        <p:cNvGrpSpPr/>
+        <p:nvPr/>
+      </p:nvGrpSpPr>
+      <p:grpSpPr>
+        <a:xfrm>
+          <a:off x="0" y="0"/>
+          <a:ext cx="0" cy="0"/>
+          <a:chOff x="0" y="0"/>
+          <a:chExt cx="0" cy="0"/>
+        </a:xfrm>
+      </p:grpSpPr>
+      <p:sp>
+        <p:nvSpPr>
+          <p:cNvPr id="2" name="Slide Image Placeholder 1"/>
+          <p:cNvSpPr>
+            <a:spLocks noGrp="1" noRot="1" noChangeAspect="1"/>
+          </p:cNvSpPr>
+          <p:nvPr>
+            <p:ph type="sldImg"/>
+          </p:nvPr>
+        </p:nvSpPr>
+        <p:spPr/>
+      </p:sp>
+      <p:sp>
+        <p:nvSpPr>
+          <p:cNvPr id="3" name="Notes Placeholder 2"/>
+          <p:cNvSpPr>
+            <a:spLocks noGrp="1"/>
+          </p:cNvSpPr>
+          <p:nvPr>
+            <p:ph type="body" idx="1"/>
+          </p:nvPr>
+        </p:nvSpPr>
+        <p:spPr/>
+        <p:txBody>
+          <a:bodyPr/>
+          <a:lstStyle/>
+          <a:p>
+            <a:r>
+              <a:rPr lang="pt-BR" dirty="0"/>
+              <a:t>A otimização está a ser realizada sobre folds reduzidos, e pode encontrar parâmetros que generalizam melhor, mas neste dataset específico não superam os defaults.</a:t>
+            </a:r>
+          </a:p>
+          <a:p>
+            <a:endParaRPr lang="pt-BR" dirty="0"/>
+          </a:p>
+          <a:p>
+            <a:r>
+              <a:rPr lang="pt-BR" dirty="0"/>
+              <a:t>Ao explorar combinações de hiperparâmetros mais restritivas, como limitar a profundidade das árvores ou aumentar a regularização, pode introduzir restrições que o modelo original não precisava.</a:t>
+            </a:r>
+          </a:p>
+          <a:p>
+            <a:endParaRPr lang="pt-BR" dirty="0"/>
+          </a:p>
+          <a:p>
+            <a:r>
+              <a:rPr lang="pt-BR" dirty="0"/>
+              <a:t>-------------------------------------------------</a:t>
+            </a:r>
+            <a:br>
+              <a:rPr lang="pt-BR" dirty="0"/>
+            </a:br>
+            <a:br>
+              <a:rPr lang="pt-BR" dirty="0"/>
+            </a:br>
+            <a:r>
+              <a:rPr lang="pt-BR" dirty="0"/>
+              <a:t>O motivo pelo qual isto pode acontecer é que o Wine dataset é pequeno e com classes bem separadas, o que faz com que os parâmetros por defeito já sejam suficientes para classificar. Neste cenário, a otimização não tem margem para melhorar — e ao explorar combinações de hiperparâmetros mais restritivas, como limitar a profundidade das árvores ou aumentar a regularização, pode introduzir restrições que o modelo original não precisava.</a:t>
+            </a:r>
+          </a:p>
+          <a:p>
+            <a:r>
+              <a:rPr lang="pt-BR" dirty="0"/>
+              <a:t>Com apenas 178 amostras, os folds de cross-validation são pequenos. Basta uma ou duas amostras serem mal classificadas num fold para o F1 descer de 1.0 para 0.97. </a:t>
+            </a:r>
+          </a:p>
+          <a:p>
+            <a:r>
+              <a:rPr lang="pt-BR" dirty="0"/>
+              <a:t>Isto não é um erro — é na verdade um sinal de que o problema é simples o suficiente para não necessitar de tuning agressivo. E reforça a conclusão de que as classes do Wine dataset são naturalmente bem separáveis.</a:t>
+            </a:r>
+          </a:p>
+          <a:p>
+            <a:endParaRPr lang="en-US" dirty="0"/>
+          </a:p>
+        </p:txBody>
+      </p:sp>
+      <p:sp>
+        <p:nvSpPr>
+          <p:cNvPr id="4" name="Slide Number Placeholder 3"/>
+          <p:cNvSpPr>
+            <a:spLocks noGrp="1"/>
+          </p:cNvSpPr>
+          <p:nvPr>
+            <p:ph type="sldNum" sz="quarter" idx="5"/>
+          </p:nvPr>
+        </p:nvSpPr>
+        <p:spPr/>
+        <p:txBody>
+          <a:bodyPr/>
+          <a:lstStyle/>
+          <a:p>
+            <a:fld id="{217EA878-87F4-4811-8C6C-83CB5CDC59F1}" type="slidenum">
+              <a:rPr lang="en-US" smtClean="0"/>
+              <a:t>25</a:t>
+            </a:fld>
+            <a:endParaRPr lang="en-US"/>
+          </a:p>
+        </p:txBody>
+      </p:sp>
+    </p:spTree>
+    <p:extLst>
+      <p:ext uri="{BB962C8B-B14F-4D97-AF65-F5344CB8AC3E}">
+        <p14:creationId xmlns:p14="http://schemas.microsoft.com/office/powerpoint/2010/main" val="1379937352"/>
+      </p:ext>
+    </p:extLst>
+  </p:cSld>
+  <p:clrMapOvr>
+    <a:masterClrMapping/>
+  </p:clrMapOvr>
+</p:notes>
+</file>
+
+<file path=ppt/notesSlides/notesSlide2.xml><?xml version="1.0" encoding="utf-8"?>
+<p:notes xmlns:a="http://schemas.openxmlformats.org/drawingml/2006/main" xmlns:r="http://schemas.openxmlformats.org/officeDocument/2006/relationships" xmlns:p="http://schemas.openxmlformats.org/presentationml/2006/main">
+  <p:cSld>
+    <p:spTree>
+      <p:nvGrpSpPr>
+        <p:cNvPr id="1" name=""/>
+        <p:cNvGrpSpPr/>
+        <p:nvPr/>
+      </p:nvGrpSpPr>
+      <p:grpSpPr>
+        <a:xfrm>
+          <a:off x="0" y="0"/>
+          <a:ext cx="0" cy="0"/>
+          <a:chOff x="0" y="0"/>
+          <a:chExt cx="0" cy="0"/>
+        </a:xfrm>
+      </p:grpSpPr>
+      <p:sp>
+        <p:nvSpPr>
+          <p:cNvPr id="2" name="Slide Image Placeholder 1"/>
+          <p:cNvSpPr>
+            <a:spLocks noGrp="1" noRot="1" noChangeAspect="1"/>
+          </p:cNvSpPr>
+          <p:nvPr>
+            <p:ph type="sldImg"/>
+          </p:nvPr>
+        </p:nvSpPr>
+        <p:spPr/>
+      </p:sp>
+      <p:sp>
+        <p:nvSpPr>
+          <p:cNvPr id="3" name="Notes Placeholder 2"/>
+          <p:cNvSpPr>
+            <a:spLocks noGrp="1"/>
+          </p:cNvSpPr>
+          <p:nvPr>
+            <p:ph type="body" idx="1"/>
+          </p:nvPr>
+        </p:nvSpPr>
+        <p:spPr/>
+        <p:txBody>
+          <a:bodyPr/>
+          <a:lstStyle/>
+          <a:p>
             <a:r>
               <a:rPr lang="pt-BR" dirty="0"/>
               <a:t>Cada boxplot compara </a:t>
@@ -598,7 +812,7 @@
 </p:notes>
 </file>
 
-<file path=ppt/notesSlides/notesSlide2.xml><?xml version="1.0" encoding="utf-8"?>
+<file path=ppt/notesSlides/notesSlide3.xml><?xml version="1.0" encoding="utf-8"?>
 <p:notes xmlns:a="http://schemas.openxmlformats.org/drawingml/2006/main" xmlns:r="http://schemas.openxmlformats.org/officeDocument/2006/relationships" xmlns:p="http://schemas.openxmlformats.org/presentationml/2006/main">
   <p:cSld>
     <p:spTree>
@@ -730,7 +944,7 @@
 </p:notes>
 </file>
 
-<file path=ppt/notesSlides/notesSlide3.xml><?xml version="1.0" encoding="utf-8"?>
+<file path=ppt/notesSlides/notesSlide4.xml><?xml version="1.0" encoding="utf-8"?>
 <p:notes xmlns:a="http://schemas.openxmlformats.org/drawingml/2006/main" xmlns:r="http://schemas.openxmlformats.org/officeDocument/2006/relationships" xmlns:p="http://schemas.openxmlformats.org/presentationml/2006/main">
   <p:cSld>
     <p:spTree>
@@ -856,7 +1070,7 @@
 </p:notes>
 </file>
 
-<file path=ppt/notesSlides/notesSlide4.xml><?xml version="1.0" encoding="utf-8"?>
+<file path=ppt/notesSlides/notesSlide5.xml><?xml version="1.0" encoding="utf-8"?>
 <p:notes xmlns:a="http://schemas.openxmlformats.org/drawingml/2006/main" xmlns:r="http://schemas.openxmlformats.org/officeDocument/2006/relationships" xmlns:p="http://schemas.openxmlformats.org/presentationml/2006/main">
   <p:cSld>
     <p:spTree>
@@ -932,14 +1146,40 @@
           <a:p>
             <a:r>
               <a:rPr lang="pt-BR" dirty="0"/>
+              <a:t>Em resumo, o PCA confirma que o problema é bem estruturado e que a classificação é viável, mesmo com uma redução significativa de dimensionalidade.</a:t>
+            </a:r>
+          </a:p>
+          <a:p>
+            <a:r>
+              <a:rPr lang="pt-BR" dirty="0"/>
+              <a:t>------</a:t>
+            </a:r>
+          </a:p>
+          <a:p>
+            <a:pPr marL="0" marR="0" lvl="0" indent="0" algn="l" defTabSz="914400" rtl="0" eaLnBrk="1" fontAlgn="auto" latinLnBrk="0" hangingPunct="1">
+              <a:lnSpc>
+                <a:spcPct val="100000"/>
+              </a:lnSpc>
+              <a:spcBef>
+                <a:spcPts val="0"/>
+              </a:spcBef>
+              <a:spcAft>
+                <a:spcPts val="0"/>
+              </a:spcAft>
+              <a:buClrTx/>
+              <a:buSzTx/>
+              <a:buFontTx/>
+              <a:buNone/>
+              <a:tabLst/>
+              <a:defRPr/>
+            </a:pPr>
+            <a:r>
+              <a:rPr lang="pt-BR" dirty="0"/>
               <a:t>Existe alguma sobreposição entre estas duas últimas, o que sugere que é nessa fronteira que os modelos mais complexos poderão fazer a diferença face à Logistic Regression.</a:t>
             </a:r>
           </a:p>
           <a:p>
-            <a:r>
-              <a:rPr lang="pt-BR" dirty="0"/>
-              <a:t>Em resumo, o PCA confirma que o problema é bem estruturado e que a classificação é viável, mesmo com uma redução significativa de dimensionalidade.</a:t>
-            </a:r>
+            <a:endParaRPr lang="pt-BR" dirty="0"/>
           </a:p>
           <a:p>
             <a:endParaRPr lang="en-US" dirty="0"/>
@@ -979,183 +1219,6 @@
     <p:extLst>
       <p:ext uri="{BB962C8B-B14F-4D97-AF65-F5344CB8AC3E}">
         <p14:creationId xmlns:p14="http://schemas.microsoft.com/office/powerpoint/2010/main" val="2027584820"/>
-      </p:ext>
-    </p:extLst>
-  </p:cSld>
-  <p:clrMapOvr>
-    <a:masterClrMapping/>
-  </p:clrMapOvr>
-</p:notes>
-</file>
-
-<file path=ppt/notesSlides/notesSlide5.xml><?xml version="1.0" encoding="utf-8"?>
-<p:notes xmlns:a="http://schemas.openxmlformats.org/drawingml/2006/main" xmlns:r="http://schemas.openxmlformats.org/officeDocument/2006/relationships" xmlns:p="http://schemas.openxmlformats.org/presentationml/2006/main">
-  <p:cSld>
-    <p:spTree>
-      <p:nvGrpSpPr>
-        <p:cNvPr id="1" name=""/>
-        <p:cNvGrpSpPr/>
-        <p:nvPr/>
-      </p:nvGrpSpPr>
-      <p:grpSpPr>
-        <a:xfrm>
-          <a:off x="0" y="0"/>
-          <a:ext cx="0" cy="0"/>
-          <a:chOff x="0" y="0"/>
-          <a:chExt cx="0" cy="0"/>
-        </a:xfrm>
-      </p:grpSpPr>
-      <p:sp>
-        <p:nvSpPr>
-          <p:cNvPr id="2" name="Slide Image Placeholder 1"/>
-          <p:cNvSpPr>
-            <a:spLocks noGrp="1" noRot="1" noChangeAspect="1"/>
-          </p:cNvSpPr>
-          <p:nvPr>
-            <p:ph type="sldImg"/>
-          </p:nvPr>
-        </p:nvSpPr>
-        <p:spPr/>
-      </p:sp>
-      <p:sp>
-        <p:nvSpPr>
-          <p:cNvPr id="3" name="Notes Placeholder 2"/>
-          <p:cNvSpPr>
-            <a:spLocks noGrp="1"/>
-          </p:cNvSpPr>
-          <p:nvPr>
-            <p:ph type="body" idx="1"/>
-          </p:nvPr>
-        </p:nvSpPr>
-        <p:spPr/>
-        <p:txBody>
-          <a:bodyPr/>
-          <a:lstStyle/>
-          <a:p>
-            <a:pPr>
-              <a:spcAft>
-                <a:spcPts val="800"/>
-              </a:spcAft>
-              <a:defRPr sz="1800">
-                <a:solidFill>
-                  <a:srgbClr val="333333"/>
-                </a:solidFill>
-              </a:defRPr>
-            </a:pPr>
-            <a:r>
-              <a:rPr lang="pt-BR" dirty="0"/>
-              <a:t>NÃO LER!!!!!!!!!!!!!!</a:t>
-            </a:r>
-          </a:p>
-          <a:p>
-            <a:pPr>
-              <a:spcAft>
-                <a:spcPts val="800"/>
-              </a:spcAft>
-              <a:defRPr sz="1800">
-                <a:solidFill>
-                  <a:srgbClr val="333333"/>
-                </a:solidFill>
-              </a:defRPr>
-            </a:pPr>
-            <a:r>
-              <a:rPr lang="pt-BR" dirty="0"/>
-              <a:t>Com apenas 178 amostras, 30% deixaria só 124 para treino</a:t>
-            </a:r>
-          </a:p>
-          <a:p>
-            <a:pPr>
-              <a:spcAft>
-                <a:spcPts val="800"/>
-              </a:spcAft>
-              <a:defRPr sz="1800">
-                <a:solidFill>
-                  <a:srgbClr val="333333"/>
-                </a:solidFill>
-              </a:defRPr>
-            </a:pPr>
-            <a:r>
-              <a:rPr lang="pt-BR" dirty="0"/>
-              <a:t>• Com 20%, mantemos 142 amostras de treino</a:t>
-            </a:r>
-          </a:p>
-          <a:p>
-            <a:pPr>
-              <a:spcAft>
-                <a:spcPts val="800"/>
-              </a:spcAft>
-              <a:defRPr sz="1800">
-                <a:solidFill>
-                  <a:srgbClr val="333333"/>
-                </a:solidFill>
-              </a:defRPr>
-            </a:pPr>
-            <a:r>
-              <a:rPr lang="pt-BR" dirty="0"/>
-              <a:t>• 36 amostras de teste ainda permitem avaliação significativa</a:t>
-            </a:r>
-          </a:p>
-          <a:p>
-            <a:pPr>
-              <a:spcAft>
-                <a:spcPts val="800"/>
-              </a:spcAft>
-              <a:defRPr sz="1800">
-                <a:solidFill>
-                  <a:srgbClr val="333333"/>
-                </a:solidFill>
-              </a:defRPr>
-            </a:pPr>
-            <a:endParaRPr lang="pt-BR" dirty="0"/>
-          </a:p>
-          <a:p>
-            <a:pPr>
-              <a:spcAft>
-                <a:spcPts val="800"/>
-              </a:spcAft>
-              <a:defRPr sz="1800">
-                <a:solidFill>
-                  <a:srgbClr val="333333"/>
-                </a:solidFill>
-              </a:defRPr>
-            </a:pPr>
-            <a:r>
-              <a:rPr lang="pt-BR" dirty="0"/>
-              <a:t>A estratificacao permite tentar manter um equilibrio entre a distribuicao das diferentes classes.</a:t>
-            </a:r>
-          </a:p>
-          <a:p>
-            <a:endParaRPr lang="en-US" dirty="0"/>
-          </a:p>
-        </p:txBody>
-      </p:sp>
-      <p:sp>
-        <p:nvSpPr>
-          <p:cNvPr id="4" name="Slide Number Placeholder 3"/>
-          <p:cNvSpPr>
-            <a:spLocks noGrp="1"/>
-          </p:cNvSpPr>
-          <p:nvPr>
-            <p:ph type="sldNum" sz="quarter" idx="5"/>
-          </p:nvPr>
-        </p:nvSpPr>
-        <p:spPr/>
-        <p:txBody>
-          <a:bodyPr/>
-          <a:lstStyle/>
-          <a:p>
-            <a:fld id="{217EA878-87F4-4811-8C6C-83CB5CDC59F1}" type="slidenum">
-              <a:rPr lang="en-US" smtClean="0"/>
-              <a:t>16</a:t>
-            </a:fld>
-            <a:endParaRPr lang="en-US"/>
-          </a:p>
-        </p:txBody>
-      </p:sp>
-    </p:spTree>
-    <p:extLst>
-      <p:ext uri="{BB962C8B-B14F-4D97-AF65-F5344CB8AC3E}">
-        <p14:creationId xmlns:p14="http://schemas.microsoft.com/office/powerpoint/2010/main" val="2963843833"/>
       </p:ext>
     </p:extLst>
   </p:cSld>
@@ -1209,6 +1272,122 @@
           <a:bodyPr/>
           <a:lstStyle/>
           <a:p>
+            <a:pPr>
+              <a:spcAft>
+                <a:spcPts val="800"/>
+              </a:spcAft>
+              <a:defRPr sz="1800">
+                <a:solidFill>
+                  <a:srgbClr val="333333"/>
+                </a:solidFill>
+              </a:defRPr>
+            </a:pPr>
+            <a:r>
+              <a:rPr lang="pt-BR" dirty="0"/>
+              <a:t>NÃO LER!!!!!!!!!!!!!!</a:t>
+            </a:r>
+          </a:p>
+          <a:p>
+            <a:pPr>
+              <a:spcAft>
+                <a:spcPts val="800"/>
+              </a:spcAft>
+              <a:defRPr sz="1800">
+                <a:solidFill>
+                  <a:srgbClr val="333333"/>
+                </a:solidFill>
+              </a:defRPr>
+            </a:pPr>
+            <a:r>
+              <a:rPr lang="pt-BR" dirty="0"/>
+              <a:t>Com apenas 178 amostras, 30% deixaria só 124 para treino</a:t>
+            </a:r>
+          </a:p>
+          <a:p>
+            <a:pPr>
+              <a:spcAft>
+                <a:spcPts val="800"/>
+              </a:spcAft>
+              <a:defRPr sz="1800">
+                <a:solidFill>
+                  <a:srgbClr val="333333"/>
+                </a:solidFill>
+              </a:defRPr>
+            </a:pPr>
+            <a:r>
+              <a:rPr lang="pt-BR" dirty="0"/>
+              <a:t>• Com 20%, mantemos 142 amostras de treino</a:t>
+            </a:r>
+          </a:p>
+          <a:p>
+            <a:pPr>
+              <a:spcAft>
+                <a:spcPts val="800"/>
+              </a:spcAft>
+              <a:defRPr sz="1800">
+                <a:solidFill>
+                  <a:srgbClr val="333333"/>
+                </a:solidFill>
+              </a:defRPr>
+            </a:pPr>
+            <a:r>
+              <a:rPr lang="pt-BR" dirty="0"/>
+              <a:t>• 36 amostras de teste ainda permitem avaliação significativa</a:t>
+            </a:r>
+          </a:p>
+          <a:p>
+            <a:pPr>
+              <a:spcAft>
+                <a:spcPts val="800"/>
+              </a:spcAft>
+              <a:defRPr sz="1800">
+                <a:solidFill>
+                  <a:srgbClr val="333333"/>
+                </a:solidFill>
+              </a:defRPr>
+            </a:pPr>
+            <a:r>
+              <a:rPr lang="pt-BR" sz="1800" kern="1200" dirty="0">
+                <a:solidFill>
+                  <a:schemeClr val="tx1"/>
+                </a:solidFill>
+                <a:latin typeface="+mn-lt"/>
+                <a:ea typeface="+mn-ea"/>
+                <a:cs typeface="+mn-cs"/>
+              </a:rPr>
+              <a:t>5 fold = 1 fold é usado para validação e os outros 4 para treino</a:t>
+            </a:r>
+          </a:p>
+          <a:p>
+            <a:pPr>
+              <a:spcAft>
+                <a:spcPts val="800"/>
+              </a:spcAft>
+              <a:defRPr sz="1800">
+                <a:solidFill>
+                  <a:srgbClr val="333333"/>
+                </a:solidFill>
+              </a:defRPr>
+            </a:pPr>
+            <a:endParaRPr lang="pt-BR" dirty="0"/>
+          </a:p>
+          <a:p>
+            <a:pPr>
+              <a:spcAft>
+                <a:spcPts val="800"/>
+              </a:spcAft>
+              <a:defRPr sz="1800">
+                <a:solidFill>
+                  <a:srgbClr val="333333"/>
+                </a:solidFill>
+              </a:defRPr>
+            </a:pPr>
+            <a:r>
+              <a:rPr lang="pt-BR" dirty="0"/>
+              <a:t>A estratificacao permite tentar manter um equilibrio entre a distribuicao das diferentes classes.</a:t>
+            </a:r>
+          </a:p>
+          <a:p>
             <a:endParaRPr lang="en-US" dirty="0"/>
           </a:p>
         </p:txBody>
@@ -1230,7 +1409,7 @@
           <a:p>
             <a:fld id="{217EA878-87F4-4811-8C6C-83CB5CDC59F1}" type="slidenum">
               <a:rPr lang="en-US" smtClean="0"/>
-              <a:t>18</a:t>
+              <a:t>16</a:t>
             </a:fld>
             <a:endParaRPr lang="en-US"/>
           </a:p>
@@ -1239,7 +1418,7 @@
     </p:spTree>
     <p:extLst>
       <p:ext uri="{BB962C8B-B14F-4D97-AF65-F5344CB8AC3E}">
-        <p14:creationId xmlns:p14="http://schemas.microsoft.com/office/powerpoint/2010/main" val="216170205"/>
+        <p14:creationId xmlns:p14="http://schemas.microsoft.com/office/powerpoint/2010/main" val="2963843833"/>
       </p:ext>
     </p:extLst>
   </p:cSld>
@@ -1314,7 +1493,7 @@
           <a:p>
             <a:fld id="{217EA878-87F4-4811-8C6C-83CB5CDC59F1}" type="slidenum">
               <a:rPr lang="en-US" smtClean="0"/>
-              <a:t>19</a:t>
+              <a:t>18</a:t>
             </a:fld>
             <a:endParaRPr lang="en-US"/>
           </a:p>
@@ -1323,7 +1502,7 @@
     </p:spTree>
     <p:extLst>
       <p:ext uri="{BB962C8B-B14F-4D97-AF65-F5344CB8AC3E}">
-        <p14:creationId xmlns:p14="http://schemas.microsoft.com/office/powerpoint/2010/main" val="1461901556"/>
+        <p14:creationId xmlns:p14="http://schemas.microsoft.com/office/powerpoint/2010/main" val="216170205"/>
       </p:ext>
     </p:extLst>
   </p:cSld>
@@ -1398,7 +1577,7 @@
           <a:p>
             <a:fld id="{217EA878-87F4-4811-8C6C-83CB5CDC59F1}" type="slidenum">
               <a:rPr lang="en-US" smtClean="0"/>
-              <a:t>21</a:t>
+              <a:t>19</a:t>
             </a:fld>
             <a:endParaRPr lang="en-US"/>
           </a:p>
@@ -1407,7 +1586,7 @@
     </p:spTree>
     <p:extLst>
       <p:ext uri="{BB962C8B-B14F-4D97-AF65-F5344CB8AC3E}">
-        <p14:creationId xmlns:p14="http://schemas.microsoft.com/office/powerpoint/2010/main" val="1652452954"/>
+        <p14:creationId xmlns:p14="http://schemas.microsoft.com/office/powerpoint/2010/main" val="1461901556"/>
       </p:ext>
     </p:extLst>
   </p:cSld>
@@ -1461,19 +1640,6 @@
           <a:bodyPr/>
           <a:lstStyle/>
           <a:p>
-            <a:r>
-              <a:rPr lang="pt-BR" dirty="0"/>
-              <a:t>A otimização está a otimizar sobre estes folds reduzidos, e pode encontrar parâmetros que generalizam melhor, mas neste dataset específico não superam os defaults.</a:t>
-            </a:r>
-          </a:p>
-          <a:p>
-            <a:endParaRPr lang="pt-BR" dirty="0"/>
-          </a:p>
-          <a:p>
-            <a:r>
-              <a:rPr lang="pt-BR" dirty="0"/>
-              <a:t>Ao explorar combinações de hiperparâmetros mais restritivas, como limitar a profundidade das árvores ou aumentar a regularização, pode introduzir restrições que o modelo original não precisava.</a:t>
-            </a:r>
             <a:endParaRPr lang="en-US" dirty="0"/>
           </a:p>
         </p:txBody>
@@ -1495,7 +1661,7 @@
           <a:p>
             <a:fld id="{217EA878-87F4-4811-8C6C-83CB5CDC59F1}" type="slidenum">
               <a:rPr lang="en-US" smtClean="0"/>
-              <a:t>25</a:t>
+              <a:t>21</a:t>
             </a:fld>
             <a:endParaRPr lang="en-US"/>
           </a:p>
@@ -1504,7 +1670,7 @@
     </p:spTree>
     <p:extLst>
       <p:ext uri="{BB962C8B-B14F-4D97-AF65-F5344CB8AC3E}">
-        <p14:creationId xmlns:p14="http://schemas.microsoft.com/office/powerpoint/2010/main" val="1379937352"/>
+        <p14:creationId xmlns:p14="http://schemas.microsoft.com/office/powerpoint/2010/main" val="1652452954"/>
       </p:ext>
     </p:extLst>
   </p:cSld>
@@ -1693,7 +1859,7 @@
           <a:p>
             <a:fld id="{5BCAD085-E8A6-8845-BD4E-CB4CCA059FC4}" type="datetimeFigureOut">
               <a:rPr lang="en-US" smtClean="0"/>
-              <a:t>5/31/2026</a:t>
+              <a:t>6/1/2026</a:t>
             </a:fld>
             <a:endParaRPr lang="en-US"/>
           </a:p>
@@ -1861,7 +2027,7 @@
           <a:p>
             <a:fld id="{5BCAD085-E8A6-8845-BD4E-CB4CCA059FC4}" type="datetimeFigureOut">
               <a:rPr lang="en-US" smtClean="0"/>
-              <a:t>5/31/2026</a:t>
+              <a:t>6/1/2026</a:t>
             </a:fld>
             <a:endParaRPr lang="en-US"/>
           </a:p>
@@ -2039,7 +2205,7 @@
           <a:p>
             <a:fld id="{5BCAD085-E8A6-8845-BD4E-CB4CCA059FC4}" type="datetimeFigureOut">
               <a:rPr lang="en-US" smtClean="0"/>
-              <a:t>5/31/2026</a:t>
+              <a:t>6/1/2026</a:t>
             </a:fld>
             <a:endParaRPr lang="en-US"/>
           </a:p>
@@ -2207,7 +2373,7 @@
           <a:p>
             <a:fld id="{5BCAD085-E8A6-8845-BD4E-CB4CCA059FC4}" type="datetimeFigureOut">
               <a:rPr lang="en-US" smtClean="0"/>
-              <a:t>5/31/2026</a:t>
+              <a:t>6/1/2026</a:t>
             </a:fld>
             <a:endParaRPr lang="en-US"/>
           </a:p>
@@ -2452,7 +2618,7 @@
           <a:p>
             <a:fld id="{5BCAD085-E8A6-8845-BD4E-CB4CCA059FC4}" type="datetimeFigureOut">
               <a:rPr lang="en-US" smtClean="0"/>
-              <a:t>5/31/2026</a:t>
+              <a:t>6/1/2026</a:t>
             </a:fld>
             <a:endParaRPr lang="en-US"/>
           </a:p>
@@ -2737,7 +2903,7 @@
           <a:p>
             <a:fld id="{5BCAD085-E8A6-8845-BD4E-CB4CCA059FC4}" type="datetimeFigureOut">
               <a:rPr lang="en-US" smtClean="0"/>
-              <a:t>5/31/2026</a:t>
+              <a:t>6/1/2026</a:t>
             </a:fld>
             <a:endParaRPr lang="en-US"/>
           </a:p>
@@ -3156,7 +3322,7 @@
           <a:p>
             <a:fld id="{5BCAD085-E8A6-8845-BD4E-CB4CCA059FC4}" type="datetimeFigureOut">
               <a:rPr lang="en-US" smtClean="0"/>
-              <a:t>5/31/2026</a:t>
+              <a:t>6/1/2026</a:t>
             </a:fld>
             <a:endParaRPr lang="en-US"/>
           </a:p>
@@ -3273,7 +3439,7 @@
           <a:p>
             <a:fld id="{5BCAD085-E8A6-8845-BD4E-CB4CCA059FC4}" type="datetimeFigureOut">
               <a:rPr lang="en-US" smtClean="0"/>
-              <a:t>5/31/2026</a:t>
+              <a:t>6/1/2026</a:t>
             </a:fld>
             <a:endParaRPr lang="en-US"/>
           </a:p>
@@ -3368,7 +3534,7 @@
           <a:p>
             <a:fld id="{5BCAD085-E8A6-8845-BD4E-CB4CCA059FC4}" type="datetimeFigureOut">
               <a:rPr lang="en-US" smtClean="0"/>
-              <a:t>5/31/2026</a:t>
+              <a:t>6/1/2026</a:t>
             </a:fld>
             <a:endParaRPr lang="en-US"/>
           </a:p>
@@ -3643,7 +3809,7 @@
           <a:p>
             <a:fld id="{5BCAD085-E8A6-8845-BD4E-CB4CCA059FC4}" type="datetimeFigureOut">
               <a:rPr lang="en-US" smtClean="0"/>
-              <a:t>5/31/2026</a:t>
+              <a:t>6/1/2026</a:t>
             </a:fld>
             <a:endParaRPr lang="en-US"/>
           </a:p>
@@ -3895,7 +4061,7 @@
           <a:p>
             <a:fld id="{5BCAD085-E8A6-8845-BD4E-CB4CCA059FC4}" type="datetimeFigureOut">
               <a:rPr lang="en-US" smtClean="0"/>
-              <a:t>5/31/2026</a:t>
+              <a:t>6/1/2026</a:t>
             </a:fld>
             <a:endParaRPr lang="en-US"/>
           </a:p>
@@ -4106,7 +4272,7 @@
           <a:p>
             <a:fld id="{5BCAD085-E8A6-8845-BD4E-CB4CCA059FC4}" type="datetimeFigureOut">
               <a:rPr lang="en-US" smtClean="0"/>
-              <a:t>5/31/2026</a:t>
+              <a:t>6/1/2026</a:t>
             </a:fld>
             <a:endParaRPr lang="en-US"/>
           </a:p>
@@ -8356,7 +8522,7 @@
         </p:nvSpPr>
         <p:spPr>
           <a:xfrm>
-            <a:off x="731520" y="1280160"/>
+            <a:off x="731520" y="1143000"/>
             <a:ext cx="10515600" cy="2308324"/>
           </a:xfrm>
           <a:prstGeom prst="rect">
@@ -8471,8 +8637,8 @@
         </p:blipFill>
         <p:spPr>
           <a:xfrm>
-            <a:off x="731520" y="4955204"/>
-            <a:ext cx="10515600" cy="1765636"/>
+            <a:off x="2017242" y="5351192"/>
+            <a:ext cx="8157209" cy="1369647"/>
           </a:xfrm>
           <a:prstGeom prst="rect">
             <a:avLst/>
@@ -8493,7 +8659,7 @@
         </p:nvSpPr>
         <p:spPr>
           <a:xfrm>
-            <a:off x="731520" y="4274262"/>
+            <a:off x="669091" y="4914405"/>
             <a:ext cx="10515600" cy="369332"/>
           </a:xfrm>
           <a:prstGeom prst="rect">
@@ -8594,6 +8760,36 @@
           </a:p>
         </p:txBody>
       </p:sp>
+      <p:pic>
+        <p:nvPicPr>
+          <p:cNvPr id="8" name="Picture 7">
+            <a:extLst>
+              <a:ext uri="{FF2B5EF4-FFF2-40B4-BE49-F238E27FC236}">
+                <a16:creationId xmlns:a16="http://schemas.microsoft.com/office/drawing/2014/main" id="{BAF1AFFB-A5EE-FE8E-70A9-8C1924E378F7}"/>
+              </a:ext>
+            </a:extLst>
+          </p:cNvPr>
+          <p:cNvPicPr>
+            <a:picLocks noChangeAspect="1"/>
+          </p:cNvPicPr>
+          <p:nvPr/>
+        </p:nvPicPr>
+        <p:blipFill>
+          <a:blip r:embed="rId4"/>
+          <a:stretch>
+            <a:fillRect/>
+          </a:stretch>
+        </p:blipFill>
+        <p:spPr>
+          <a:xfrm>
+            <a:off x="2855845" y="3584729"/>
+            <a:ext cx="6175510" cy="1196270"/>
+          </a:xfrm>
+          <a:prstGeom prst="rect">
+            <a:avLst/>
+          </a:prstGeom>
+        </p:spPr>
+      </p:pic>
     </p:spTree>
   </p:cSld>
   <p:clrMapOvr>
@@ -8975,7 +9171,7 @@
 </file>
 
 <file path=ppt/slides/slide24.xml><?xml version="1.0" encoding="utf-8"?>
-<p:sld xmlns:a="http://schemas.openxmlformats.org/drawingml/2006/main" xmlns:r="http://schemas.openxmlformats.org/officeDocument/2006/relationships" xmlns:p="http://schemas.openxmlformats.org/presentationml/2006/main">
+<p:sld xmlns:a="http://schemas.openxmlformats.org/drawingml/2006/main" xmlns:r="http://schemas.openxmlformats.org/officeDocument/2006/relationships" xmlns:p="http://schemas.openxmlformats.org/presentationml/2006/main" show="0">
   <p:cSld>
     <p:spTree>
       <p:nvGrpSpPr>
